--- a/docs/교재/통합반/05일차/통합반_05일차.pptx
+++ b/docs/교재/통합반/05일차/통합반_05일차.pptx
@@ -637,7 +637,7 @@
           <a:lstStyle/>
           <a:p>
             <a:r>
-              <a:t>에이전트 하나는 이 항목들로 정의됩니다. 쿨러 사건을 맡은 냉각 긴급 대응 에이전트의 값입니다. 목표는 무엇을 이루어야 끝나는지를, 도구는 무엇을 쓸 수 있는지를 정합니다. 업무 지침은 에이전트 스킬이라는 파일로 주며, 그 형식은 다음 시간에 다룹니다.</a:t>
+              <a:t>에이전트 하나는 이 항목들로 정의됩니다. 쿨러 사건을 맡은 냉각 긴급 대응 에이전트의 값입니다. 목표는 무엇을 이루어야 끝나는지를, 도구는 무엇을 쓸 수 있는지를 정합니다. 목표 칸은 에이전트에 적힌 문장을 이 수업의 낱말로 줄여 옮긴 요지입니다. 업무 지침은 에이전트 스킬이라는 파일로 주며, 그 형식은 다음 시간에 다룹니다.</a:t>
             </a:r>
           </a:p>
         </p:txBody>
@@ -1337,7 +1337,7 @@
           <a:lstStyle/>
           <a:p>
             <a:r>
-              <a:t>첫날에 본 사건의 시간표입니다. 경보가 나고 승인되기까지 108초가 걸렸고, 그 가운데 94초는 사람이 아니라 에이전트가 일한 시간이었습니다. 그동안 에이전트는 원인을 가리고 조치 후보 넷을 견주어 추천안을 냈습니다. 오늘은 이 94초 안에서 일어난 일을 풀어 봅니다.</a:t>
+              <a:t>1일차에 본 사건의 시간표입니다. 경보가 나고 승인되기까지 108초가 걸렸고, 그 가운데 94초는 사람이 아니라 에이전트가 일한 시간이었습니다. 그동안 에이전트는 원인을 가리고 조치 후보 넷을 견주어 추천안을 냈습니다. 오늘은 이 94초 안에서 일어난 일을 풀어 봅니다.</a:t>
             </a:r>
           </a:p>
         </p:txBody>
@@ -1967,7 +1967,7 @@
           <a:lstStyle/>
           <a:p>
             <a:r>
-              <a:t>네 정보원 가운데 온톨로지와 SOP는 같은 지식 그래프에 들어 있습니다. 앞 시간까지 만든 그래프입니다. 에이전트는 고장 유형에서 CAUSES를 거슬러 원인 후보 셋을, MITIGATED_BY를 따라 조치 방법을 얻었습니다. 후보마다 붙은 사전 확률은 아직 값을 보지 않은 상태의 가능성이며, 어느 후보가 맞는지는 값을 읽어야 정해집니다.</a:t>
+              <a:t>네 정보원 가운데 온톨로지와 SOP는 같은 지식 그래프에 들어 있습니다. 앞 시간까지 만든 그래프입니다. 에이전트는 고장 유형에서 CAUSES를 거슬러 원인 후보 셋을, MITIGATED_BY를 따라 조치 방법을 얻었습니다. 그래프가 알려 주는 것은 후보까지이며, 셋 가운데 어느 것이 맞는지는 값을 읽어야 정해집니다.</a:t>
             </a:r>
           </a:p>
         </p:txBody>
@@ -2177,7 +2177,7 @@
           <a:lstStyle/>
           <a:p>
             <a:r>
-              <a:t>업무 DB에서 읽은 값입니다. 에이전트는 설비 이름 하나를 물음으로 넣어 이 설비에 걸린 생산오더를 받았습니다. 납기까지 5.98시간이 남았고 남은 수량은 1,500개입니다. 셋째 날에 부하를 낮추는 조치가 납기에서 점수를 잃은 것이 이 값 때문이었습니다. 출하 대기 로트도 같은 방식으로 읽었습니다.</a:t>
+              <a:t>업무 DB에서 읽은 값입니다. 에이전트는 설비 이름 하나를 물음으로 넣어 이 설비에 걸린 생산오더를 받았습니다. 납기까지 5.98시간이 남았고 남은 수량은 1,500개입니다. 3일차에 부하를 낮추는 조치가 납기에서 점수를 잃은 것이 이 값 때문이었습니다. 출하 대기 로트도 같은 방식으로 읽었습니다.</a:t>
             </a:r>
           </a:p>
         </p:txBody>
@@ -4207,7 +4207,7 @@
           <a:lstStyle/>
           <a:p>
             <a:r>
-              <a:t>정답보다 판단 기준이 중요합니다. 첫 문항의 3번은 같은 일을 방법을 바꾸어 다시 한 경우에 해당하는 말이며 이 장면과는 다릅니다. 둘째 문항의 1번은 묵은 값을, 2번은 실패를 0으로, 3번은 가능성을 확인으로 바꾸어 쓴 것입니다. 셋째 문항의 4번은 사람에게 물었다는 점에서 그럴듯하지만, 답변이 권한을 바꾸지 않는다는 점에서 틀렸습니다.</a:t>
+              <a:t>정답보다 판단 기준이 중요합니다. 첫 문항의 3번은 같은 일을 방법을 바꾸어 다시 한 경우에 해당하는 말이며 이 장면과는 다릅니다. 둘째 문항의 1번은 묵은 값을, 2번은 실패를 0으로, 3번은 후보를 확인된 원인으로 바꾸어 쓴 것입니다. 셋째 문항의 4번은 사람에게 물었다는 점에서 그럴듯하지만, 답변이 권한을 바꾸지 않는다는 점에서 틀렸습니다.</a:t>
             </a:r>
           </a:p>
         </p:txBody>
@@ -9591,7 +9591,7 @@
       </p:sp>
       <p:pic>
         <p:nvPicPr>
-          <p:cNvPr id="6" name="삽화:세요소.svg" descr="illust_3060620954292221563_1791735250.png"/>
+          <p:cNvPr id="6" name="삽화:세요소.svg" descr="illust_6146995912497116358_1791735250.png"/>
           <p:cNvPicPr>
             <a:picLocks noChangeAspect="1"/>
           </p:cNvPicPr>
@@ -10479,7 +10479,7 @@
                 <a:ea typeface="맑은 고딕"/>
                 <a:cs typeface="맑은 고딕"/>
               </a:rPr>
-              <a:t>쿨러 성능 저하 경보의 원인을 진단하고, 냉각 조치 후보를 규정과 회사 목표로 견주어 추천 하나와 뒤진 대안을 올린다</a:t>
+              <a:t>요지: 쿨러 성능 저하 경보의 원인을 진단하고, 냉각 조치 후보를 규정과 회사 목표로 견주어 추천 하나와 뒤진 대안을 올린다</a:t>
             </a:r>
           </a:p>
         </p:txBody>
@@ -12509,7 +12509,7 @@
       </p:sp>
       <p:pic>
         <p:nvPicPr>
-          <p:cNvPr id="6" name="삽화:실행고리.svg" descr="illust_4900566599779213877_1791735250.png"/>
+          <p:cNvPr id="6" name="삽화:실행고리.svg" descr="illust_2578930934406602895_1791735250.png"/>
           <p:cNvPicPr>
             <a:picLocks noChangeAspect="1"/>
           </p:cNvPicPr>
@@ -19448,7 +19448,7 @@
                 <a:ea typeface="맑은 고딕"/>
                 <a:cs typeface="맑은 고딕"/>
               </a:rPr>
-              <a:t>          11:13:09</a:t>
+              <a:t>          </a:t>
             </a:r>
             <a:r>
               <a:rPr sz="1300" b="0">
@@ -19459,7 +19459,7 @@
                 <a:ea typeface="맑은 고딕"/>
                 <a:cs typeface="맑은 고딕"/>
               </a:rPr>
-              <a:t>부터</a:t>
+              <a:t>시작부터</a:t>
             </a:r>
             <a:r>
               <a:rPr sz="1300" b="0">
@@ -26949,7 +26949,7 @@
       </p:sp>
       <p:pic>
         <p:nvPicPr>
-          <p:cNvPr id="6" name="삽화:정보원.svg" descr="illust_2988825920293428238_1791735250.png"/>
+          <p:cNvPr id="6" name="삽화:정보원.svg" descr="illust_3273111784509331166_1791735250.png"/>
           <p:cNvPicPr>
             <a:picLocks noChangeAspect="1"/>
           </p:cNvPicPr>
@@ -28676,24 +28676,6 @@
               <a:t>원인</a:t>
             </a:r>
           </a:p>
-          <a:p>
-            <a:pPr algn="ctr">
-              <a:lnSpc>
-                <a:spcPct val="110000"/>
-              </a:lnSpc>
-            </a:pPr>
-            <a:r>
-              <a:rPr sz="1100" b="0">
-                <a:solidFill>
-                  <a:srgbClr val="556175"/>
-                </a:solidFill>
-                <a:latin typeface="맑은 고딕"/>
-                <a:ea typeface="맑은 고딕"/>
-                <a:cs typeface="맑은 고딕"/>
-              </a:rPr>
-              <a:t>사전 확률 0.6</a:t>
-            </a:r>
-          </a:p>
         </p:txBody>
       </p:sp>
       <p:sp>
@@ -28782,24 +28764,6 @@
               <a:t>원인</a:t>
             </a:r>
           </a:p>
-          <a:p>
-            <a:pPr algn="ctr">
-              <a:lnSpc>
-                <a:spcPct val="110000"/>
-              </a:lnSpc>
-            </a:pPr>
-            <a:r>
-              <a:rPr sz="1100" b="0">
-                <a:solidFill>
-                  <a:srgbClr val="556175"/>
-                </a:solidFill>
-                <a:latin typeface="맑은 고딕"/>
-                <a:ea typeface="맑은 고딕"/>
-                <a:cs typeface="맑은 고딕"/>
-              </a:rPr>
-              <a:t>사전 확률 0.2</a:t>
-            </a:r>
-          </a:p>
         </p:txBody>
       </p:sp>
       <p:sp>
@@ -28886,24 +28850,6 @@
                 <a:cs typeface="맑은 고딕"/>
               </a:rPr>
               <a:t>원인</a:t>
-            </a:r>
-          </a:p>
-          <a:p>
-            <a:pPr algn="ctr">
-              <a:lnSpc>
-                <a:spcPct val="110000"/>
-              </a:lnSpc>
-            </a:pPr>
-            <a:r>
-              <a:rPr sz="1100" b="0">
-                <a:solidFill>
-                  <a:srgbClr val="556175"/>
-                </a:solidFill>
-                <a:latin typeface="맑은 고딕"/>
-                <a:ea typeface="맑은 고딕"/>
-                <a:cs typeface="맑은 고딕"/>
-              </a:rPr>
-              <a:t>사전 확률 0.2</a:t>
             </a:r>
           </a:p>
         </p:txBody>
@@ -31338,7 +31284,7 @@
       </p:sp>
       <p:pic>
         <p:nvPicPr>
-          <p:cNvPr id="6" name="삽화:도구경유.svg" descr="illust_1430775501747690859_1791735250.png"/>
+          <p:cNvPr id="6" name="삽화:도구경유.svg" descr="illust_8786329867532934831_1791735250.png"/>
           <p:cNvPicPr>
             <a:picLocks noChangeAspect="1"/>
           </p:cNvPicPr>
@@ -33621,7 +33567,7 @@
       </p:sp>
       <p:pic>
         <p:nvPicPr>
-          <p:cNvPr id="6" name="삽화:신선도.svg" descr="illust_8041066619012114846_1791735250.png"/>
+          <p:cNvPr id="6" name="삽화:신선도.svg" descr="illust_6670884534858234540_1791735250.png"/>
           <p:cNvPicPr>
             <a:picLocks noChangeAspect="1"/>
           </p:cNvPicPr>
@@ -35185,7 +35131,7 @@
       </p:sp>
       <p:pic>
         <p:nvPicPr>
-          <p:cNvPr id="6" name="삽화:멈춤조건.svg" descr="illust_3733167627142012144_1791735250.png"/>
+          <p:cNvPr id="6" name="삽화:멈춤조건.svg" descr="illust_6237002557433204010_1791735250.png"/>
           <p:cNvPicPr>
             <a:picLocks noChangeAspect="1"/>
           </p:cNvPicPr>
@@ -40051,8 +39997,8 @@
         </p:nvSpPr>
         <p:spPr>
           <a:xfrm>
-            <a:off x="548640" y="2603182"/>
-            <a:ext cx="2485567" cy="2776346"/>
+            <a:off x="548640" y="2498598"/>
+            <a:ext cx="2485567" cy="2985515"/>
           </a:xfrm>
           <a:prstGeom prst="roundRect">
             <a:avLst>
@@ -40082,7 +40028,7 @@
         </p:nvSpPr>
         <p:spPr>
           <a:xfrm>
-            <a:off x="1425663" y="2786062"/>
+            <a:off x="1425663" y="2681478"/>
             <a:ext cx="731520" cy="731520"/>
           </a:xfrm>
           <a:prstGeom prst="ellipse">
@@ -40119,7 +40065,7 @@
         </p:blipFill>
         <p:spPr>
           <a:xfrm>
-            <a:off x="1579283" y="2939681"/>
+            <a:off x="1579283" y="2835097"/>
             <a:ext cx="424281" cy="424281"/>
           </a:xfrm>
           <a:prstGeom prst="rect">
@@ -40135,8 +40081,8 @@
         </p:nvSpPr>
         <p:spPr>
           <a:xfrm>
-            <a:off x="621792" y="3590734"/>
-            <a:ext cx="2339263" cy="1715642"/>
+            <a:off x="621792" y="3486150"/>
+            <a:ext cx="2339263" cy="1924811"/>
           </a:xfrm>
           <a:prstGeom prst="rect">
             <a:avLst/>
@@ -40248,8 +40194,8 @@
         </p:nvSpPr>
         <p:spPr>
           <a:xfrm>
-            <a:off x="3418255" y="2603182"/>
-            <a:ext cx="2485567" cy="2776346"/>
+            <a:off x="3418255" y="2498598"/>
+            <a:ext cx="2485567" cy="2985515"/>
           </a:xfrm>
           <a:prstGeom prst="roundRect">
             <a:avLst>
@@ -40281,7 +40227,7 @@
         </p:nvSpPr>
         <p:spPr>
           <a:xfrm>
-            <a:off x="4295279" y="2786062"/>
+            <a:off x="4295279" y="2681478"/>
             <a:ext cx="731520" cy="731520"/>
           </a:xfrm>
           <a:prstGeom prst="ellipse">
@@ -40318,7 +40264,7 @@
         </p:blipFill>
         <p:spPr>
           <a:xfrm>
-            <a:off x="4448898" y="2939681"/>
+            <a:off x="4448898" y="2835097"/>
             <a:ext cx="424281" cy="424281"/>
           </a:xfrm>
           <a:prstGeom prst="rect">
@@ -40334,8 +40280,8 @@
         </p:nvSpPr>
         <p:spPr>
           <a:xfrm>
-            <a:off x="3491407" y="3590734"/>
-            <a:ext cx="2339263" cy="1715642"/>
+            <a:off x="3491407" y="3486150"/>
+            <a:ext cx="2339263" cy="1924811"/>
           </a:xfrm>
           <a:prstGeom prst="rect">
             <a:avLst/>
@@ -40447,8 +40393,8 @@
         </p:nvSpPr>
         <p:spPr>
           <a:xfrm>
-            <a:off x="6287871" y="2603182"/>
-            <a:ext cx="2485567" cy="2776346"/>
+            <a:off x="6287871" y="2498598"/>
+            <a:ext cx="2485567" cy="2985515"/>
           </a:xfrm>
           <a:prstGeom prst="roundRect">
             <a:avLst>
@@ -40478,7 +40424,7 @@
         </p:nvSpPr>
         <p:spPr>
           <a:xfrm>
-            <a:off x="7164895" y="2786062"/>
+            <a:off x="7164895" y="2681478"/>
             <a:ext cx="731520" cy="731520"/>
           </a:xfrm>
           <a:prstGeom prst="ellipse">
@@ -40515,7 +40461,7 @@
         </p:blipFill>
         <p:spPr>
           <a:xfrm>
-            <a:off x="7318514" y="2939681"/>
+            <a:off x="7318514" y="2835097"/>
             <a:ext cx="424281" cy="424281"/>
           </a:xfrm>
           <a:prstGeom prst="rect">
@@ -40531,8 +40477,8 @@
         </p:nvSpPr>
         <p:spPr>
           <a:xfrm>
-            <a:off x="6361023" y="3590734"/>
-            <a:ext cx="2339263" cy="1715642"/>
+            <a:off x="6361023" y="3486150"/>
+            <a:ext cx="2339263" cy="1924811"/>
           </a:xfrm>
           <a:prstGeom prst="rect">
             <a:avLst/>
@@ -40624,6 +40570,27 @@
                 <a:cs typeface="맑은 고딕"/>
               </a:rPr>
               <a:t>고쳐서 다시 낸다</a:t>
+            </a:r>
+          </a:p>
+          <a:p>
+            <a:pPr algn="ctr">
+              <a:lnSpc>
+                <a:spcPct val="110000"/>
+              </a:lnSpc>
+              <a:spcAft>
+                <a:spcPts val="400"/>
+              </a:spcAft>
+            </a:pPr>
+            <a:r>
+              <a:rPr sz="1350" b="0">
+                <a:solidFill>
+                  <a:srgbClr val="1F2A3A"/>
+                </a:solidFill>
+                <a:latin typeface="맑은 고딕"/>
+                <a:ea typeface="맑은 고딕"/>
+                <a:cs typeface="맑은 고딕"/>
+              </a:rPr>
+              <a:t>교정은 두 번까지</a:t>
             </a:r>
           </a:p>
         </p:txBody>
@@ -40665,8 +40632,8 @@
         </p:nvSpPr>
         <p:spPr>
           <a:xfrm>
-            <a:off x="9157487" y="2603182"/>
-            <a:ext cx="2485567" cy="2776346"/>
+            <a:off x="9157487" y="2498598"/>
+            <a:ext cx="2485567" cy="2985515"/>
           </a:xfrm>
           <a:prstGeom prst="roundRect">
             <a:avLst>
@@ -40696,7 +40663,7 @@
         </p:nvSpPr>
         <p:spPr>
           <a:xfrm>
-            <a:off x="10034511" y="2786062"/>
+            <a:off x="10034511" y="2681478"/>
             <a:ext cx="731520" cy="731520"/>
           </a:xfrm>
           <a:prstGeom prst="ellipse">
@@ -40733,7 +40700,7 @@
         </p:blipFill>
         <p:spPr>
           <a:xfrm>
-            <a:off x="10188130" y="2939681"/>
+            <a:off x="10188130" y="2835097"/>
             <a:ext cx="424281" cy="424281"/>
           </a:xfrm>
           <a:prstGeom prst="rect">
@@ -40749,8 +40716,8 @@
         </p:nvSpPr>
         <p:spPr>
           <a:xfrm>
-            <a:off x="9230639" y="3590734"/>
-            <a:ext cx="2339263" cy="1715642"/>
+            <a:off x="9230639" y="3486150"/>
+            <a:ext cx="2339263" cy="1924811"/>
           </a:xfrm>
           <a:prstGeom prst="rect">
             <a:avLst/>
@@ -40999,7 +40966,7 @@
       </p:sp>
       <p:pic>
         <p:nvPicPr>
-          <p:cNvPr id="6" name="삽화:기록한줄.svg" descr="illust_2864895455896050901_1791735250.png"/>
+          <p:cNvPr id="6" name="삽화:기록한줄.svg" descr="illust_5014587980448710761_1791735250.png"/>
           <p:cNvPicPr>
             <a:picLocks noChangeAspect="1"/>
           </p:cNvPicPr>
@@ -43535,7 +43502,7 @@
       </p:sp>
       <p:pic>
         <p:nvPicPr>
-          <p:cNvPr id="6" name="삽화:경보에서승인까지.svg" descr="illust_1954173382686978854_1791735250.png"/>
+          <p:cNvPr id="6" name="삽화:경보에서승인까지.svg" descr="illust_6198921596578802048_1791735250.png"/>
           <p:cNvPicPr>
             <a:picLocks noChangeAspect="1"/>
           </p:cNvPicPr>
@@ -49307,7 +49274,7 @@
                 <a:ea typeface="맑은 고딕"/>
                 <a:cs typeface="맑은 고딕"/>
               </a:rPr>
-              <a:t>이 실습을 마치면 불량 접수 한 건이 품질 유형, 확인 항목, 담당 부서, 대응 초안을 갖춘 품질 대응 카드로 바뀐다.</a:t>
+              <a:t>불량 접수 한 건을 품질 유형, 확인 항목, 담당 부서, 대응 초안을 갖춘 품질 대응 카드로 바꾼다.</a:t>
             </a:r>
           </a:p>
         </p:txBody>
@@ -51530,7 +51497,7 @@
                 <a:ea typeface="맑은 고딕"/>
                 <a:cs typeface="맑은 고딕"/>
               </a:rPr>
-              <a:t>이 실습을 마치면 센서 값의 변화를 그린 도표와, 이상 구간 · 관련 태그 · 조회 기간을 근거와 함께 적은 요약이 남는다.</a:t>
+              <a:t>센서 값의 변화를 도표로 그리고, 이상 구간과 관련 태그와 조회 기간을 근거와 함께 요약한다.</a:t>
             </a:r>
           </a:p>
         </p:txBody>
@@ -54662,7 +54629,7 @@
                 <a:ea typeface="맑은 고딕"/>
                 <a:cs typeface="맑은 고딕"/>
               </a:rPr>
-              <a:t>사전 확률이 가장 높은 쿨러 핀 오염을 확인된 원인으로 적는다</a:t>
+              <a:t>원인 후보에 올라 있는 쿨러 핀 오염을 확인된 원인으로 적는다</a:t>
             </a:r>
           </a:p>
         </p:txBody>

--- a/docs/교재/통합반/05일차/통합반_05일차.pptx
+++ b/docs/교재/통합반/05일차/통합반_05일차.pptx
@@ -9591,7 +9591,7 @@
       </p:sp>
       <p:pic>
         <p:nvPicPr>
-          <p:cNvPr id="6" name="삽화:세요소.svg" descr="illust_6146995912497116358_1791735250.png"/>
+          <p:cNvPr id="6" name="삽화:세요소.svg" descr="illust_3179733172112831589_1791735250.png"/>
           <p:cNvPicPr>
             <a:picLocks noChangeAspect="1"/>
           </p:cNvPicPr>
@@ -12509,7 +12509,7 @@
       </p:sp>
       <p:pic>
         <p:nvPicPr>
-          <p:cNvPr id="6" name="삽화:실행고리.svg" descr="illust_2578930934406602895_1791735250.png"/>
+          <p:cNvPr id="6" name="삽화:실행고리.svg" descr="illust_6176131132017266157_1791735250.png"/>
           <p:cNvPicPr>
             <a:picLocks noChangeAspect="1"/>
           </p:cNvPicPr>
@@ -26949,7 +26949,7 @@
       </p:sp>
       <p:pic>
         <p:nvPicPr>
-          <p:cNvPr id="6" name="삽화:정보원.svg" descr="illust_3273111784509331166_1791735250.png"/>
+          <p:cNvPr id="6" name="삽화:정보원.svg" descr="illust_4605444663039410435_1791735250.png"/>
           <p:cNvPicPr>
             <a:picLocks noChangeAspect="1"/>
           </p:cNvPicPr>
@@ -31284,7 +31284,7 @@
       </p:sp>
       <p:pic>
         <p:nvPicPr>
-          <p:cNvPr id="6" name="삽화:도구경유.svg" descr="illust_8786329867532934831_1791735250.png"/>
+          <p:cNvPr id="6" name="삽화:도구경유.svg" descr="illust_6948230542774029763_1791735250.png"/>
           <p:cNvPicPr>
             <a:picLocks noChangeAspect="1"/>
           </p:cNvPicPr>
@@ -33567,7 +33567,7 @@
       </p:sp>
       <p:pic>
         <p:nvPicPr>
-          <p:cNvPr id="6" name="삽화:신선도.svg" descr="illust_6670884534858234540_1791735250.png"/>
+          <p:cNvPr id="6" name="삽화:신선도.svg" descr="illust_8958210775987876058_1791735250.png"/>
           <p:cNvPicPr>
             <a:picLocks noChangeAspect="1"/>
           </p:cNvPicPr>
@@ -35131,7 +35131,7 @@
       </p:sp>
       <p:pic>
         <p:nvPicPr>
-          <p:cNvPr id="6" name="삽화:멈춤조건.svg" descr="illust_6237002557433204010_1791735250.png"/>
+          <p:cNvPr id="6" name="삽화:멈춤조건.svg" descr="illust_3433292665436746021_1791735250.png"/>
           <p:cNvPicPr>
             <a:picLocks noChangeAspect="1"/>
           </p:cNvPicPr>
@@ -40966,7 +40966,7 @@
       </p:sp>
       <p:pic>
         <p:nvPicPr>
-          <p:cNvPr id="6" name="삽화:기록한줄.svg" descr="illust_5014587980448710761_1791735250.png"/>
+          <p:cNvPr id="6" name="삽화:기록한줄.svg" descr="illust_8835672302992135116_1791735250.png"/>
           <p:cNvPicPr>
             <a:picLocks noChangeAspect="1"/>
           </p:cNvPicPr>
@@ -43502,7 +43502,7 @@
       </p:sp>
       <p:pic>
         <p:nvPicPr>
-          <p:cNvPr id="6" name="삽화:경보에서승인까지.svg" descr="illust_6198921596578802048_1791735250.png"/>
+          <p:cNvPr id="6" name="삽화:경보에서승인까지.svg" descr="illust_2077446476922219087_1791735250.png"/>
           <p:cNvPicPr>
             <a:picLocks noChangeAspect="1"/>
           </p:cNvPicPr>
@@ -53179,7 +53179,7 @@
                 <a:ea typeface="맑은 고딕"/>
                 <a:cs typeface="맑은 고딕"/>
               </a:rPr>
-              <a:t>배운 내용을 바탕으로 정답을 맞춰보세요.</a:t>
+              <a:t>배운 내용을 바탕으로 정답을 맞혀 보세요.</a:t>
             </a:r>
           </a:p>
         </p:txBody>

--- a/docs/교재/통합반/05일차/통합반_05일차.pptx
+++ b/docs/교재/통합반/05일차/통합반_05일차.pptx
@@ -3717,7 +3717,7 @@
           <a:lstStyle/>
           <a:p>
             <a:r>
-              <a:t>둘째 실습은 VS Code에서 Claude Code로 진행합니다. 공용 온톨로지의 관계와 제공된 센서 입력을 읽어 후보 원인과 증거, 다음 점검 순서를 내는 에이전트를 구성합니다. 확인되지 않은 원인은 단정하지 않고 가설로 표시해야 합니다. 끝나면 점검 계획과 그 계획에 쓴 근거가 파일로 남습니다.</a:t>
+              <a:t>둘째 실습은 바이브 코딩으로 진행합니다. 공용 온톨로지의 관계와 제공된 센서 입력을 읽어 후보 원인과 증거, 다음 점검 순서를 내는 에이전트를 구성합니다. 확인되지 않은 원인은 단정하지 않고 가설로 표시해야 합니다. 끝나면 점검 계획과 그 계획에 쓴 근거가 파일로 남습니다.</a:t>
             </a:r>
           </a:p>
         </p:txBody>
@@ -9591,7 +9591,7 @@
       </p:sp>
       <p:pic>
         <p:nvPicPr>
-          <p:cNvPr id="6" name="삽화:세요소.svg" descr="illust_3179733172112831589_1791735250.png"/>
+          <p:cNvPr id="6" name="삽화:세요소.svg" descr="illust_4287036622040089347_1791735250.png"/>
           <p:cNvPicPr>
             <a:picLocks noChangeAspect="1"/>
           </p:cNvPicPr>
@@ -12509,7 +12509,7 @@
       </p:sp>
       <p:pic>
         <p:nvPicPr>
-          <p:cNvPr id="6" name="삽화:실행고리.svg" descr="illust_6176131132017266157_1791735250.png"/>
+          <p:cNvPr id="6" name="삽화:실행고리.svg" descr="illust_5262896766216802726_1791735250.png"/>
           <p:cNvPicPr>
             <a:picLocks noChangeAspect="1"/>
           </p:cNvPicPr>
@@ -26949,7 +26949,7 @@
       </p:sp>
       <p:pic>
         <p:nvPicPr>
-          <p:cNvPr id="6" name="삽화:정보원.svg" descr="illust_4605444663039410435_1791735250.png"/>
+          <p:cNvPr id="6" name="삽화:정보원.svg" descr="illust_3743599691563922195_1791735250.png"/>
           <p:cNvPicPr>
             <a:picLocks noChangeAspect="1"/>
           </p:cNvPicPr>
@@ -31284,7 +31284,7 @@
       </p:sp>
       <p:pic>
         <p:nvPicPr>
-          <p:cNvPr id="6" name="삽화:도구경유.svg" descr="illust_6948230542774029763_1791735250.png"/>
+          <p:cNvPr id="6" name="삽화:도구경유.svg" descr="illust_8121285003554873193_1791735250.png"/>
           <p:cNvPicPr>
             <a:picLocks noChangeAspect="1"/>
           </p:cNvPicPr>
@@ -33567,7 +33567,7 @@
       </p:sp>
       <p:pic>
         <p:nvPicPr>
-          <p:cNvPr id="6" name="삽화:신선도.svg" descr="illust_8958210775987876058_1791735250.png"/>
+          <p:cNvPr id="6" name="삽화:신선도.svg" descr="illust_6392144590541796855_1791735250.png"/>
           <p:cNvPicPr>
             <a:picLocks noChangeAspect="1"/>
           </p:cNvPicPr>
@@ -35131,7 +35131,7 @@
       </p:sp>
       <p:pic>
         <p:nvPicPr>
-          <p:cNvPr id="6" name="삽화:멈춤조건.svg" descr="illust_3433292665436746021_1791735250.png"/>
+          <p:cNvPr id="6" name="삽화:멈춤조건.svg" descr="illust_3445337004070725116_1791735250.png"/>
           <p:cNvPicPr>
             <a:picLocks noChangeAspect="1"/>
           </p:cNvPicPr>
@@ -40966,7 +40966,7 @@
       </p:sp>
       <p:pic>
         <p:nvPicPr>
-          <p:cNvPr id="6" name="삽화:기록한줄.svg" descr="illust_8835672302992135116_1791735250.png"/>
+          <p:cNvPr id="6" name="삽화:기록한줄.svg" descr="illust_8512072030949059806_1791735250.png"/>
           <p:cNvPicPr>
             <a:picLocks noChangeAspect="1"/>
           </p:cNvPicPr>
@@ -43502,7 +43502,7 @@
       </p:sp>
       <p:pic>
         <p:nvPicPr>
-          <p:cNvPr id="6" name="삽화:경보에서승인까지.svg" descr="illust_2077446476922219087_1791735250.png"/>
+          <p:cNvPr id="6" name="삽화:경보에서승인까지.svg" descr="illust_9054018080056981680_1791735250.png"/>
           <p:cNvPicPr>
             <a:picLocks noChangeAspect="1"/>
           </p:cNvPicPr>
@@ -47953,7 +47953,7 @@
                 <a:ea typeface="맑은 고딕"/>
                 <a:cs typeface="맑은 고딕"/>
               </a:rPr>
-              <a:t>Claude Code로 온톨로지의 관계와 센서 입력을 읽어 점검 계획을 내는 에이전트를 구성한다</a:t>
+              <a:t>바이브 코딩으로 온톨로지의 관계와 센서 입력을 읽어 점검 계획을 내는 에이전트를 구성한다</a:t>
             </a:r>
           </a:p>
         </p:txBody>
